--- a/presentations/06-asm-state-and-input/06-asm-state-and-input-lab.pptx
+++ b/presentations/06-asm-state-and-input/06-asm-state-and-input-lab.pptx
@@ -134,7 +134,7 @@
   <p:extLst>
     <p:ext uri="{521415D9-36F7-43E2-AB2F-B90AF26B5E84}">
       <p14:sectionLst xmlns:p14="http://schemas.microsoft.com/office/powerpoint/2010/main">
-        <p14:section name="Opening" id="{6bcaecaa-2a6f-f150-2a6d-b2a9b57770cc}">
+        <p14:section name="Opening" id="{e8e7ca9e-0c4f-e0f0-e300-866b037b3526}">
           <p14:sldIdLst>
             <p14:sldId id="256"/>
             <p14:sldId id="257"/>
@@ -142,7 +142,7 @@
             <p14:sldId id="259"/>
           </p14:sldIdLst>
         </p14:section>
-        <p14:section name="Lamps" id="{0169d9c5-2b9c-6b01-cdb1-5de22f44f491}">
+        <p14:section name="Lamps" id="{a2a36203-14cb-edda-9a97-b9659dd4af51}">
           <p14:sldIdLst>
             <p14:sldId id="260"/>
             <p14:sldId id="261"/>
@@ -151,7 +151,7 @@
             <p14:sldId id="264"/>
           </p14:sldIdLst>
         </p14:section>
-        <p14:section name="Move" id="{ba5e8b08-1fb9-085d-5c64-4b0b816d8ff5}">
+        <p14:section name="Move" id="{aaa5ffe2-b3c0-5219-5388-62e516470acd}">
           <p14:sldIdLst>
             <p14:sldId id="265"/>
             <p14:sldId id="266"/>
@@ -160,7 +160,7 @@
             <p14:sldId id="269"/>
           </p14:sldIdLst>
         </p14:section>
-        <p14:section name="Clamp" id="{b3d262f2-02d6-590a-e6e9-b07a0ea689b0}">
+        <p14:section name="Clamp" id="{f5f35823-1174-5281-3f5b-66e34d33406a}">
           <p14:sldIdLst>
             <p14:sldId id="270"/>
             <p14:sldId id="271"/>
@@ -169,7 +169,7 @@
             <p14:sldId id="274"/>
           </p14:sldIdLst>
         </p14:section>
-        <p14:section name="Second axis" id="{b70850d8-e0d2-6839-3b19-22c9010bd45e}">
+        <p14:section name="Second axis" id="{98810db5-2886-6b8b-12b7-67c01521d7dd}">
           <p14:sldIdLst>
             <p14:sldId id="275"/>
             <p14:sldId id="276"/>
@@ -177,7 +177,7 @@
             <p14:sldId id="278"/>
           </p14:sldIdLst>
         </p14:section>
-        <p14:section name="Bug hunt" id="{c124a516-e36a-68be-45e8-d57dc3b88d67}">
+        <p14:section name="Bug hunt" id="{eac5be8c-047e-3e97-f8f1-fa38c8d4a58f}">
           <p14:sldIdLst>
             <p14:sldId id="279"/>
             <p14:sldId id="280"/>
@@ -185,7 +185,7 @@
             <p14:sldId id="282"/>
           </p14:sldIdLst>
         </p14:section>
-        <p14:section name="Closing" id="{96ed0bc9-4ef9-0e41-2bc7-51767a13c9de}">
+        <p14:section name="Closing" id="{6a414db6-429a-f1fd-288b-4e18b02a272d}">
           <p14:sldIdLst>
             <p14:sldId id="283"/>
           </p14:sldIdLst>
